--- a/Slides/Football 1/Footballl_1_Lecture.pptx
+++ b/Slides/Football 1/Footballl_1_Lecture.pptx
@@ -219,7 +219,7 @@
           <a:p>
             <a:fld id="{C04E5E84-956F-4423-97B3-5936A6D8EEEE}" type="datetimeFigureOut">
               <a:rPr lang="en-US" smtClean="0"/>
-              <a:t>3/29/2023</a:t>
+              <a:t>4/10/2026</a:t>
             </a:fld>
             <a:endParaRPr lang="en-US"/>
           </a:p>
@@ -671,7 +671,7 @@
           <a:p>
             <a:fld id="{3881C039-66A3-4640-815B-3B5A8B7D868D}" type="datetimeFigureOut">
               <a:rPr lang="en-US" smtClean="0"/>
-              <a:t>3/29/2023</a:t>
+              <a:t>4/10/2026</a:t>
             </a:fld>
             <a:endParaRPr lang="en-US"/>
           </a:p>
@@ -969,7 +969,7 @@
           <a:p>
             <a:fld id="{3881C039-66A3-4640-815B-3B5A8B7D868D}" type="datetimeFigureOut">
               <a:rPr lang="en-US" smtClean="0"/>
-              <a:t>3/29/2023</a:t>
+              <a:t>4/10/2026</a:t>
             </a:fld>
             <a:endParaRPr lang="en-US"/>
           </a:p>
@@ -1161,7 +1161,7 @@
           <a:p>
             <a:fld id="{3881C039-66A3-4640-815B-3B5A8B7D868D}" type="datetimeFigureOut">
               <a:rPr lang="en-US" smtClean="0"/>
-              <a:t>3/29/2023</a:t>
+              <a:t>4/10/2026</a:t>
             </a:fld>
             <a:endParaRPr lang="en-US"/>
           </a:p>
@@ -1422,7 +1422,7 @@
           <a:p>
             <a:fld id="{3881C039-66A3-4640-815B-3B5A8B7D868D}" type="datetimeFigureOut">
               <a:rPr lang="en-US" smtClean="0"/>
-              <a:t>3/29/2023</a:t>
+              <a:t>4/10/2026</a:t>
             </a:fld>
             <a:endParaRPr lang="en-US"/>
           </a:p>
@@ -1846,7 +1846,7 @@
           <a:p>
             <a:fld id="{3881C039-66A3-4640-815B-3B5A8B7D868D}" type="datetimeFigureOut">
               <a:rPr lang="en-US" smtClean="0"/>
-              <a:t>3/29/2023</a:t>
+              <a:t>4/10/2026</a:t>
             </a:fld>
             <a:endParaRPr lang="en-US"/>
           </a:p>
@@ -2383,7 +2383,7 @@
           <a:p>
             <a:fld id="{3881C039-66A3-4640-815B-3B5A8B7D868D}" type="datetimeFigureOut">
               <a:rPr lang="en-US" smtClean="0"/>
-              <a:t>3/29/2023</a:t>
+              <a:t>4/10/2026</a:t>
             </a:fld>
             <a:endParaRPr lang="en-US"/>
           </a:p>
@@ -3247,7 +3247,7 @@
           <a:p>
             <a:fld id="{3881C039-66A3-4640-815B-3B5A8B7D868D}" type="datetimeFigureOut">
               <a:rPr lang="en-US" smtClean="0"/>
-              <a:t>3/29/2023</a:t>
+              <a:t>4/10/2026</a:t>
             </a:fld>
             <a:endParaRPr lang="en-US"/>
           </a:p>
@@ -3417,7 +3417,7 @@
           <a:p>
             <a:fld id="{3881C039-66A3-4640-815B-3B5A8B7D868D}" type="datetimeFigureOut">
               <a:rPr lang="en-US" smtClean="0"/>
-              <a:t>3/29/2023</a:t>
+              <a:t>4/10/2026</a:t>
             </a:fld>
             <a:endParaRPr lang="en-US"/>
           </a:p>
@@ -3601,7 +3601,7 @@
           <a:p>
             <a:fld id="{3881C039-66A3-4640-815B-3B5A8B7D868D}" type="datetimeFigureOut">
               <a:rPr lang="en-US" smtClean="0"/>
-              <a:t>3/29/2023</a:t>
+              <a:t>4/10/2026</a:t>
             </a:fld>
             <a:endParaRPr lang="en-US"/>
           </a:p>
@@ -3771,7 +3771,7 @@
           <a:p>
             <a:fld id="{3881C039-66A3-4640-815B-3B5A8B7D868D}" type="datetimeFigureOut">
               <a:rPr lang="en-US" smtClean="0"/>
-              <a:t>3/29/2023</a:t>
+              <a:t>4/10/2026</a:t>
             </a:fld>
             <a:endParaRPr lang="en-US"/>
           </a:p>
@@ -4015,7 +4015,7 @@
           <a:p>
             <a:fld id="{3881C039-66A3-4640-815B-3B5A8B7D868D}" type="datetimeFigureOut">
               <a:rPr lang="en-US" smtClean="0"/>
-              <a:t>3/29/2023</a:t>
+              <a:t>4/10/2026</a:t>
             </a:fld>
             <a:endParaRPr lang="en-US"/>
           </a:p>
@@ -4251,7 +4251,7 @@
           <a:p>
             <a:fld id="{3881C039-66A3-4640-815B-3B5A8B7D868D}" type="datetimeFigureOut">
               <a:rPr lang="en-US" smtClean="0"/>
-              <a:t>3/29/2023</a:t>
+              <a:t>4/10/2026</a:t>
             </a:fld>
             <a:endParaRPr lang="en-US"/>
           </a:p>
@@ -4717,7 +4717,7 @@
           <a:p>
             <a:fld id="{3881C039-66A3-4640-815B-3B5A8B7D868D}" type="datetimeFigureOut">
               <a:rPr lang="en-US" smtClean="0"/>
-              <a:t>3/29/2023</a:t>
+              <a:t>4/10/2026</a:t>
             </a:fld>
             <a:endParaRPr lang="en-US"/>
           </a:p>
@@ -4835,7 +4835,7 @@
           <a:p>
             <a:fld id="{3881C039-66A3-4640-815B-3B5A8B7D868D}" type="datetimeFigureOut">
               <a:rPr lang="en-US" smtClean="0"/>
-              <a:t>3/29/2023</a:t>
+              <a:t>4/10/2026</a:t>
             </a:fld>
             <a:endParaRPr lang="en-US"/>
           </a:p>
@@ -4930,7 +4930,7 @@
           <a:p>
             <a:fld id="{3881C039-66A3-4640-815B-3B5A8B7D868D}" type="datetimeFigureOut">
               <a:rPr lang="en-US" smtClean="0"/>
-              <a:t>3/29/2023</a:t>
+              <a:t>4/10/2026</a:t>
             </a:fld>
             <a:endParaRPr lang="en-US"/>
           </a:p>
@@ -5185,7 +5185,7 @@
           <a:p>
             <a:fld id="{3881C039-66A3-4640-815B-3B5A8B7D868D}" type="datetimeFigureOut">
               <a:rPr lang="en-US" smtClean="0"/>
-              <a:t>3/29/2023</a:t>
+              <a:t>4/10/2026</a:t>
             </a:fld>
             <a:endParaRPr lang="en-US"/>
           </a:p>
@@ -5485,7 +5485,7 @@
           <a:p>
             <a:fld id="{3881C039-66A3-4640-815B-3B5A8B7D868D}" type="datetimeFigureOut">
               <a:rPr lang="en-US" smtClean="0"/>
-              <a:t>3/29/2023</a:t>
+              <a:t>4/10/2026</a:t>
             </a:fld>
             <a:endParaRPr lang="en-US"/>
           </a:p>
@@ -5719,7 +5719,7 @@
           <a:p>
             <a:fld id="{3881C039-66A3-4640-815B-3B5A8B7D868D}" type="datetimeFigureOut">
               <a:rPr lang="en-US" smtClean="0"/>
-              <a:t>3/29/2023</a:t>
+              <a:t>4/10/2026</a:t>
             </a:fld>
             <a:endParaRPr lang="en-US"/>
           </a:p>
@@ -6585,13 +6585,13 @@
           <p:nvPr/>
         </p:nvPicPr>
         <p:blipFill>
-          <a:blip r:embed="rId4">
+          <a:blip>
             <a:extLst>
               <a:ext uri="{28A0092B-C50C-407E-A947-70E740481C1C}">
                 <a14:useLocalDpi xmlns:a14="http://schemas.microsoft.com/office/drawing/2010/main" val="0"/>
               </a:ext>
               <a:ext uri="{96DAC541-7B7A-43D3-8B79-37D633B846F1}">
-                <asvg:svgBlip xmlns:asvg="http://schemas.microsoft.com/office/drawing/2016/SVG/main" r:embed="rId5"/>
+                <asvg:svgBlip xmlns:asvg="http://schemas.microsoft.com/office/drawing/2016/SVG/main" r:embed="rId4"/>
               </a:ext>
             </a:extLst>
           </a:blip>
@@ -6967,13 +6967,13 @@
           <p:nvPr/>
         </p:nvPicPr>
         <p:blipFill>
-          <a:blip r:embed="rId5">
+          <a:blip>
             <a:extLst>
               <a:ext uri="{28A0092B-C50C-407E-A947-70E740481C1C}">
                 <a14:useLocalDpi xmlns:a14="http://schemas.microsoft.com/office/drawing/2010/main" val="0"/>
               </a:ext>
               <a:ext uri="{96DAC541-7B7A-43D3-8B79-37D633B846F1}">
-                <asvg:svgBlip xmlns:asvg="http://schemas.microsoft.com/office/drawing/2016/SVG/main" r:embed="rId6"/>
+                <asvg:svgBlip xmlns:asvg="http://schemas.microsoft.com/office/drawing/2016/SVG/main" r:embed="rId5"/>
               </a:ext>
             </a:extLst>
           </a:blip>
@@ -7156,13 +7156,13 @@
           <p:nvPr/>
         </p:nvPicPr>
         <p:blipFill>
-          <a:blip r:embed="rId5">
+          <a:blip>
             <a:extLst>
               <a:ext uri="{28A0092B-C50C-407E-A947-70E740481C1C}">
                 <a14:useLocalDpi xmlns:a14="http://schemas.microsoft.com/office/drawing/2010/main" val="0"/>
               </a:ext>
               <a:ext uri="{96DAC541-7B7A-43D3-8B79-37D633B846F1}">
-                <asvg:svgBlip xmlns:asvg="http://schemas.microsoft.com/office/drawing/2016/SVG/main" r:embed="rId6"/>
+                <asvg:svgBlip xmlns:asvg="http://schemas.microsoft.com/office/drawing/2016/SVG/main" r:embed="rId5"/>
               </a:ext>
             </a:extLst>
           </a:blip>
@@ -7195,7 +7195,7 @@
           <p:nvPr/>
         </p:nvPicPr>
         <p:blipFill>
-          <a:blip r:embed="rId7"/>
+          <a:blip r:embed="rId6"/>
           <a:stretch>
             <a:fillRect/>
           </a:stretch>
@@ -7983,13 +7983,13 @@
           <p:nvPr/>
         </p:nvPicPr>
         <p:blipFill>
-          <a:blip r:embed="rId6">
+          <a:blip>
             <a:extLst>
               <a:ext uri="{28A0092B-C50C-407E-A947-70E740481C1C}">
                 <a14:useLocalDpi xmlns:a14="http://schemas.microsoft.com/office/drawing/2010/main" val="0"/>
               </a:ext>
               <a:ext uri="{96DAC541-7B7A-43D3-8B79-37D633B846F1}">
-                <asvg:svgBlip xmlns:asvg="http://schemas.microsoft.com/office/drawing/2016/SVG/main" r:embed="rId7"/>
+                <asvg:svgBlip xmlns:asvg="http://schemas.microsoft.com/office/drawing/2016/SVG/main" r:embed="rId6"/>
               </a:ext>
             </a:extLst>
           </a:blip>
@@ -8172,13 +8172,13 @@
           <p:nvPr/>
         </p:nvPicPr>
         <p:blipFill>
-          <a:blip r:embed="rId6">
+          <a:blip>
             <a:extLst>
               <a:ext uri="{28A0092B-C50C-407E-A947-70E740481C1C}">
                 <a14:useLocalDpi xmlns:a14="http://schemas.microsoft.com/office/drawing/2010/main" val="0"/>
               </a:ext>
               <a:ext uri="{96DAC541-7B7A-43D3-8B79-37D633B846F1}">
-                <asvg:svgBlip xmlns:asvg="http://schemas.microsoft.com/office/drawing/2016/SVG/main" r:embed="rId7"/>
+                <asvg:svgBlip xmlns:asvg="http://schemas.microsoft.com/office/drawing/2016/SVG/main" r:embed="rId6"/>
               </a:ext>
             </a:extLst>
           </a:blip>
@@ -8214,7 +8214,7 @@
           </p:nvPr>
         </p:nvPicPr>
         <p:blipFill>
-          <a:blip r:embed="rId8"/>
+          <a:blip r:embed="rId7"/>
           <a:stretch>
             <a:fillRect/>
           </a:stretch>
@@ -8937,13 +8937,13 @@
           <p:nvPr/>
         </p:nvPicPr>
         <p:blipFill>
-          <a:blip r:embed="rId5">
+          <a:blip>
             <a:extLst>
               <a:ext uri="{28A0092B-C50C-407E-A947-70E740481C1C}">
                 <a14:useLocalDpi xmlns:a14="http://schemas.microsoft.com/office/drawing/2010/main" val="0"/>
               </a:ext>
               <a:ext uri="{96DAC541-7B7A-43D3-8B79-37D633B846F1}">
-                <asvg:svgBlip xmlns:asvg="http://schemas.microsoft.com/office/drawing/2016/SVG/main" r:embed="rId6"/>
+                <asvg:svgBlip xmlns:asvg="http://schemas.microsoft.com/office/drawing/2016/SVG/main" r:embed="rId5"/>
               </a:ext>
             </a:extLst>
           </a:blip>
@@ -9126,13 +9126,13 @@
           <p:nvPr/>
         </p:nvPicPr>
         <p:blipFill>
-          <a:blip r:embed="rId5">
+          <a:blip>
             <a:extLst>
               <a:ext uri="{28A0092B-C50C-407E-A947-70E740481C1C}">
                 <a14:useLocalDpi xmlns:a14="http://schemas.microsoft.com/office/drawing/2010/main" val="0"/>
               </a:ext>
               <a:ext uri="{96DAC541-7B7A-43D3-8B79-37D633B846F1}">
-                <asvg:svgBlip xmlns:asvg="http://schemas.microsoft.com/office/drawing/2016/SVG/main" r:embed="rId6"/>
+                <asvg:svgBlip xmlns:asvg="http://schemas.microsoft.com/office/drawing/2016/SVG/main" r:embed="rId5"/>
               </a:ext>
             </a:extLst>
           </a:blip>
@@ -9944,13 +9944,13 @@
           <p:nvPr/>
         </p:nvPicPr>
         <p:blipFill>
-          <a:blip r:embed="rId5">
+          <a:blip>
             <a:extLst>
               <a:ext uri="{28A0092B-C50C-407E-A947-70E740481C1C}">
                 <a14:useLocalDpi xmlns:a14="http://schemas.microsoft.com/office/drawing/2010/main" val="0"/>
               </a:ext>
               <a:ext uri="{96DAC541-7B7A-43D3-8B79-37D633B846F1}">
-                <asvg:svgBlip xmlns:asvg="http://schemas.microsoft.com/office/drawing/2016/SVG/main" r:embed="rId6"/>
+                <asvg:svgBlip xmlns:asvg="http://schemas.microsoft.com/office/drawing/2016/SVG/main" r:embed="rId5"/>
               </a:ext>
             </a:extLst>
           </a:blip>
@@ -10133,13 +10133,13 @@
           <p:nvPr/>
         </p:nvPicPr>
         <p:blipFill>
-          <a:blip r:embed="rId5">
+          <a:blip>
             <a:extLst>
               <a:ext uri="{28A0092B-C50C-407E-A947-70E740481C1C}">
                 <a14:useLocalDpi xmlns:a14="http://schemas.microsoft.com/office/drawing/2010/main" val="0"/>
               </a:ext>
               <a:ext uri="{96DAC541-7B7A-43D3-8B79-37D633B846F1}">
-                <asvg:svgBlip xmlns:asvg="http://schemas.microsoft.com/office/drawing/2016/SVG/main" r:embed="rId6"/>
+                <asvg:svgBlip xmlns:asvg="http://schemas.microsoft.com/office/drawing/2016/SVG/main" r:embed="rId5"/>
               </a:ext>
             </a:extLst>
           </a:blip>
@@ -11062,13 +11062,13 @@
           <p:nvPr/>
         </p:nvPicPr>
         <p:blipFill>
-          <a:blip r:embed="rId5">
+          <a:blip>
             <a:extLst>
               <a:ext uri="{28A0092B-C50C-407E-A947-70E740481C1C}">
                 <a14:useLocalDpi xmlns:a14="http://schemas.microsoft.com/office/drawing/2010/main" val="0"/>
               </a:ext>
               <a:ext uri="{96DAC541-7B7A-43D3-8B79-37D633B846F1}">
-                <asvg:svgBlip xmlns:asvg="http://schemas.microsoft.com/office/drawing/2016/SVG/main" r:embed="rId6"/>
+                <asvg:svgBlip xmlns:asvg="http://schemas.microsoft.com/office/drawing/2016/SVG/main" r:embed="rId5"/>
               </a:ext>
             </a:extLst>
           </a:blip>
@@ -11251,13 +11251,13 @@
           <p:nvPr/>
         </p:nvPicPr>
         <p:blipFill>
-          <a:blip r:embed="rId5">
+          <a:blip>
             <a:extLst>
               <a:ext uri="{28A0092B-C50C-407E-A947-70E740481C1C}">
                 <a14:useLocalDpi xmlns:a14="http://schemas.microsoft.com/office/drawing/2010/main" val="0"/>
               </a:ext>
               <a:ext uri="{96DAC541-7B7A-43D3-8B79-37D633B846F1}">
-                <asvg:svgBlip xmlns:asvg="http://schemas.microsoft.com/office/drawing/2016/SVG/main" r:embed="rId6"/>
+                <asvg:svgBlip xmlns:asvg="http://schemas.microsoft.com/office/drawing/2016/SVG/main" r:embed="rId5"/>
               </a:ext>
             </a:extLst>
           </a:blip>
@@ -12249,13 +12249,13 @@
           <p:nvPr/>
         </p:nvPicPr>
         <p:blipFill>
-          <a:blip r:embed="rId5">
+          <a:blip>
             <a:extLst>
               <a:ext uri="{28A0092B-C50C-407E-A947-70E740481C1C}">
                 <a14:useLocalDpi xmlns:a14="http://schemas.microsoft.com/office/drawing/2010/main" val="0"/>
               </a:ext>
               <a:ext uri="{96DAC541-7B7A-43D3-8B79-37D633B846F1}">
-                <asvg:svgBlip xmlns:asvg="http://schemas.microsoft.com/office/drawing/2016/SVG/main" r:embed="rId6"/>
+                <asvg:svgBlip xmlns:asvg="http://schemas.microsoft.com/office/drawing/2016/SVG/main" r:embed="rId5"/>
               </a:ext>
             </a:extLst>
           </a:blip>
@@ -12438,13 +12438,13 @@
           <p:nvPr/>
         </p:nvPicPr>
         <p:blipFill>
-          <a:blip r:embed="rId5">
+          <a:blip>
             <a:extLst>
               <a:ext uri="{28A0092B-C50C-407E-A947-70E740481C1C}">
                 <a14:useLocalDpi xmlns:a14="http://schemas.microsoft.com/office/drawing/2010/main" val="0"/>
               </a:ext>
               <a:ext uri="{96DAC541-7B7A-43D3-8B79-37D633B846F1}">
-                <asvg:svgBlip xmlns:asvg="http://schemas.microsoft.com/office/drawing/2016/SVG/main" r:embed="rId6"/>
+                <asvg:svgBlip xmlns:asvg="http://schemas.microsoft.com/office/drawing/2016/SVG/main" r:embed="rId5"/>
               </a:ext>
             </a:extLst>
           </a:blip>
@@ -13112,13 +13112,13 @@
           <p:nvPr/>
         </p:nvPicPr>
         <p:blipFill>
-          <a:blip r:embed="rId5">
+          <a:blip>
             <a:extLst>
               <a:ext uri="{28A0092B-C50C-407E-A947-70E740481C1C}">
                 <a14:useLocalDpi xmlns:a14="http://schemas.microsoft.com/office/drawing/2010/main" val="0"/>
               </a:ext>
               <a:ext uri="{96DAC541-7B7A-43D3-8B79-37D633B846F1}">
-                <asvg:svgBlip xmlns:asvg="http://schemas.microsoft.com/office/drawing/2016/SVG/main" r:embed="rId6"/>
+                <asvg:svgBlip xmlns:asvg="http://schemas.microsoft.com/office/drawing/2016/SVG/main" r:embed="rId5"/>
               </a:ext>
             </a:extLst>
           </a:blip>
@@ -13301,13 +13301,13 @@
           <p:nvPr/>
         </p:nvPicPr>
         <p:blipFill>
-          <a:blip r:embed="rId5">
+          <a:blip>
             <a:extLst>
               <a:ext uri="{28A0092B-C50C-407E-A947-70E740481C1C}">
                 <a14:useLocalDpi xmlns:a14="http://schemas.microsoft.com/office/drawing/2010/main" val="0"/>
               </a:ext>
               <a:ext uri="{96DAC541-7B7A-43D3-8B79-37D633B846F1}">
-                <asvg:svgBlip xmlns:asvg="http://schemas.microsoft.com/office/drawing/2016/SVG/main" r:embed="rId6"/>
+                <asvg:svgBlip xmlns:asvg="http://schemas.microsoft.com/office/drawing/2016/SVG/main" r:embed="rId5"/>
               </a:ext>
             </a:extLst>
           </a:blip>
@@ -13340,7 +13340,7 @@
           <p:nvPr/>
         </p:nvPicPr>
         <p:blipFill>
-          <a:blip r:embed="rId7"/>
+          <a:blip r:embed="rId6"/>
           <a:stretch>
             <a:fillRect/>
           </a:stretch>
@@ -13908,13 +13908,13 @@
           <p:nvPr/>
         </p:nvPicPr>
         <p:blipFill>
-          <a:blip r:embed="rId5">
+          <a:blip>
             <a:extLst>
               <a:ext uri="{28A0092B-C50C-407E-A947-70E740481C1C}">
                 <a14:useLocalDpi xmlns:a14="http://schemas.microsoft.com/office/drawing/2010/main" val="0"/>
               </a:ext>
               <a:ext uri="{96DAC541-7B7A-43D3-8B79-37D633B846F1}">
-                <asvg:svgBlip xmlns:asvg="http://schemas.microsoft.com/office/drawing/2016/SVG/main" r:embed="rId6"/>
+                <asvg:svgBlip xmlns:asvg="http://schemas.microsoft.com/office/drawing/2016/SVG/main" r:embed="rId5"/>
               </a:ext>
             </a:extLst>
           </a:blip>
@@ -14097,13 +14097,13 @@
           <p:nvPr/>
         </p:nvPicPr>
         <p:blipFill>
-          <a:blip r:embed="rId5">
+          <a:blip>
             <a:extLst>
               <a:ext uri="{28A0092B-C50C-407E-A947-70E740481C1C}">
                 <a14:useLocalDpi xmlns:a14="http://schemas.microsoft.com/office/drawing/2010/main" val="0"/>
               </a:ext>
               <a:ext uri="{96DAC541-7B7A-43D3-8B79-37D633B846F1}">
-                <asvg:svgBlip xmlns:asvg="http://schemas.microsoft.com/office/drawing/2016/SVG/main" r:embed="rId6"/>
+                <asvg:svgBlip xmlns:asvg="http://schemas.microsoft.com/office/drawing/2016/SVG/main" r:embed="rId5"/>
               </a:ext>
             </a:extLst>
           </a:blip>
@@ -14721,13 +14721,13 @@
           <p:nvPr/>
         </p:nvPicPr>
         <p:blipFill>
-          <a:blip r:embed="rId5">
+          <a:blip>
             <a:extLst>
               <a:ext uri="{28A0092B-C50C-407E-A947-70E740481C1C}">
                 <a14:useLocalDpi xmlns:a14="http://schemas.microsoft.com/office/drawing/2010/main" val="0"/>
               </a:ext>
               <a:ext uri="{96DAC541-7B7A-43D3-8B79-37D633B846F1}">
-                <asvg:svgBlip xmlns:asvg="http://schemas.microsoft.com/office/drawing/2016/SVG/main" r:embed="rId6"/>
+                <asvg:svgBlip xmlns:asvg="http://schemas.microsoft.com/office/drawing/2016/SVG/main" r:embed="rId5"/>
               </a:ext>
             </a:extLst>
           </a:blip>
@@ -14910,13 +14910,13 @@
           <p:nvPr/>
         </p:nvPicPr>
         <p:blipFill>
-          <a:blip r:embed="rId5">
+          <a:blip>
             <a:extLst>
               <a:ext uri="{28A0092B-C50C-407E-A947-70E740481C1C}">
                 <a14:useLocalDpi xmlns:a14="http://schemas.microsoft.com/office/drawing/2010/main" val="0"/>
               </a:ext>
               <a:ext uri="{96DAC541-7B7A-43D3-8B79-37D633B846F1}">
-                <asvg:svgBlip xmlns:asvg="http://schemas.microsoft.com/office/drawing/2016/SVG/main" r:embed="rId6"/>
+                <asvg:svgBlip xmlns:asvg="http://schemas.microsoft.com/office/drawing/2016/SVG/main" r:embed="rId5"/>
               </a:ext>
             </a:extLst>
           </a:blip>
